--- a/lesson_22-integrating_ai_models_in_flutter_part_1/lesson_22-integrating_ai_models_in_flutter_part_1.pptx
+++ b/lesson_22-integrating_ai_models_in_flutter_part_1/lesson_22-integrating_ai_models_in_flutter_part_1.pptx
@@ -5,11 +5,12 @@
     <p:sldMasterId id="2147483648" r:id="rId1"/>
   </p:sldMasterIdLst>
   <p:notesMasterIdLst>
-    <p:notesMasterId r:id="rId4"/>
+    <p:notesMasterId r:id="rId5"/>
   </p:notesMasterIdLst>
   <p:sldIdLst>
     <p:sldId id="256" r:id="rId2"/>
     <p:sldId id="397" r:id="rId3"/>
+    <p:sldId id="398" r:id="rId4"/>
   </p:sldIdLst>
   <p:sldSz cx="12192000" cy="6858000"/>
   <p:notesSz cx="6858000" cy="9144000"/>
@@ -201,7 +202,7 @@
           <a:p>
             <a:fld id="{251090E0-FB0C-49E9-9864-9F53EABEA96F}" type="datetimeFigureOut">
               <a:rPr lang="en-GB" smtClean="0"/>
-              <a:t>19/02/2026</a:t>
+              <a:t>21/02/2026</a:t>
             </a:fld>
             <a:endParaRPr lang="en-GB"/>
           </a:p>
@@ -2582,7 +2583,7 @@
         </p:spPr>
         <p:txBody>
           <a:bodyPr vert="horz" lIns="91440" tIns="45720" rIns="91440" bIns="45720" rtlCol="0">
-            <a:normAutofit/>
+            <a:normAutofit lnSpcReduction="10000"/>
           </a:bodyPr>
           <a:lstStyle>
             <a:lvl1pPr marL="342900" indent="-342900" algn="l" defTabSz="914400" rtl="0" eaLnBrk="1" latinLnBrk="0" hangingPunct="1">
@@ -2812,6 +2813,15 @@
             </a:pPr>
             <a:r>
               <a:rPr lang="en-US" sz="3200" dirty="0"/>
+              <a:t>Setting up</a:t>
+            </a:r>
+          </a:p>
+          <a:p>
+            <a:pPr marL="0" indent="0" algn="ctr">
+              <a:buNone/>
+            </a:pPr>
+            <a:r>
+              <a:rPr lang="en-US" sz="3200" dirty="0"/>
               <a:t>Preparing the data</a:t>
             </a:r>
           </a:p>
@@ -2863,6 +2873,434 @@
     <p:extLst>
       <p:ext uri="{BB962C8B-B14F-4D97-AF65-F5344CB8AC3E}">
         <p14:creationId xmlns:p14="http://schemas.microsoft.com/office/powerpoint/2010/main" val="1533053128"/>
+      </p:ext>
+    </p:extLst>
+  </p:cSld>
+  <p:clrMapOvr>
+    <a:masterClrMapping/>
+  </p:clrMapOvr>
+</p:sld>
+</file>
+
+<file path=ppt/slides/slide3.xml><?xml version="1.0" encoding="utf-8"?>
+<p:sld xmlns:a="http://schemas.openxmlformats.org/drawingml/2006/main" xmlns:r="http://schemas.openxmlformats.org/officeDocument/2006/relationships" xmlns:p="http://schemas.openxmlformats.org/presentationml/2006/main">
+  <p:cSld>
+    <p:spTree>
+      <p:nvGrpSpPr>
+        <p:cNvPr id="1" name="">
+          <a:extLst>
+            <a:ext uri="{FF2B5EF4-FFF2-40B4-BE49-F238E27FC236}">
+              <a16:creationId xmlns:a16="http://schemas.microsoft.com/office/drawing/2014/main" id="{A2C2D409-BABF-A83C-F8CA-08333EDF0A3D}"/>
+            </a:ext>
+          </a:extLst>
+        </p:cNvPr>
+        <p:cNvGrpSpPr/>
+        <p:nvPr/>
+      </p:nvGrpSpPr>
+      <p:grpSpPr>
+        <a:xfrm>
+          <a:off x="0" y="0"/>
+          <a:ext cx="0" cy="0"/>
+          <a:chOff x="0" y="0"/>
+          <a:chExt cx="0" cy="0"/>
+        </a:xfrm>
+      </p:grpSpPr>
+      <p:sp>
+        <p:nvSpPr>
+          <p:cNvPr id="2" name="Titolo 1">
+            <a:extLst>
+              <a:ext uri="{FF2B5EF4-FFF2-40B4-BE49-F238E27FC236}">
+                <a16:creationId xmlns:a16="http://schemas.microsoft.com/office/drawing/2014/main" id="{2C6DEA5F-6717-C7CA-7858-E1F5BD82AF65}"/>
+              </a:ext>
+            </a:extLst>
+          </p:cNvPr>
+          <p:cNvSpPr>
+            <a:spLocks noGrp="1"/>
+          </p:cNvSpPr>
+          <p:nvPr>
+            <p:ph type="title"/>
+          </p:nvPr>
+        </p:nvSpPr>
+        <p:spPr>
+          <a:xfrm>
+            <a:off x="428172" y="161926"/>
+            <a:ext cx="11368314" cy="860243"/>
+          </a:xfrm>
+        </p:spPr>
+        <p:txBody>
+          <a:bodyPr anchor="ctr">
+            <a:normAutofit/>
+          </a:bodyPr>
+          <a:lstStyle/>
+          <a:p>
+            <a:r>
+              <a:rPr lang="en-GB" dirty="0"/>
+              <a:t>Outline</a:t>
+            </a:r>
+          </a:p>
+        </p:txBody>
+      </p:sp>
+      <p:sp>
+        <p:nvSpPr>
+          <p:cNvPr id="4" name="Segnaposto numero diapositiva 3">
+            <a:extLst>
+              <a:ext uri="{FF2B5EF4-FFF2-40B4-BE49-F238E27FC236}">
+                <a16:creationId xmlns:a16="http://schemas.microsoft.com/office/drawing/2014/main" id="{2D6C23AD-F6AD-068B-8B01-99581569DFDC}"/>
+              </a:ext>
+            </a:extLst>
+          </p:cNvPr>
+          <p:cNvSpPr>
+            <a:spLocks noGrp="1"/>
+          </p:cNvSpPr>
+          <p:nvPr>
+            <p:ph type="sldNum" sz="quarter" idx="12"/>
+          </p:nvPr>
+        </p:nvSpPr>
+        <p:spPr>
+          <a:xfrm>
+            <a:off x="8610600" y="6356350"/>
+            <a:ext cx="3185886" cy="365125"/>
+          </a:xfrm>
+        </p:spPr>
+        <p:txBody>
+          <a:bodyPr anchor="ctr">
+            <a:normAutofit/>
+          </a:bodyPr>
+          <a:lstStyle/>
+          <a:p>
+            <a:pPr>
+              <a:spcAft>
+                <a:spcPts val="600"/>
+              </a:spcAft>
+            </a:pPr>
+            <a:fld id="{31DE2C5B-556E-47B8-A792-024C2FCA4ACC}" type="slidenum">
+              <a:rPr lang="en-GB" smtClean="0"/>
+              <a:pPr>
+                <a:spcAft>
+                  <a:spcPts val="600"/>
+                </a:spcAft>
+              </a:pPr>
+              <a:t>3</a:t>
+            </a:fld>
+            <a:endParaRPr lang="en-GB"/>
+          </a:p>
+        </p:txBody>
+      </p:sp>
+      <p:sp>
+        <p:nvSpPr>
+          <p:cNvPr id="11" name="Segnaposto contenuto 2">
+            <a:extLst>
+              <a:ext uri="{FF2B5EF4-FFF2-40B4-BE49-F238E27FC236}">
+                <a16:creationId xmlns:a16="http://schemas.microsoft.com/office/drawing/2014/main" id="{6D529C13-8A84-67E3-4804-43081C7AF1EA}"/>
+              </a:ext>
+            </a:extLst>
+          </p:cNvPr>
+          <p:cNvSpPr txBox="1">
+            <a:spLocks/>
+          </p:cNvSpPr>
+          <p:nvPr/>
+        </p:nvSpPr>
+        <p:spPr>
+          <a:xfrm>
+            <a:off x="428172" y="1797269"/>
+            <a:ext cx="10923001" cy="4645571"/>
+          </a:xfrm>
+          <a:prstGeom prst="rect">
+            <a:avLst/>
+          </a:prstGeom>
+        </p:spPr>
+        <p:txBody>
+          <a:bodyPr vert="horz" lIns="91440" tIns="45720" rIns="91440" bIns="45720" rtlCol="0">
+            <a:normAutofit lnSpcReduction="10000"/>
+          </a:bodyPr>
+          <a:lstStyle>
+            <a:lvl1pPr marL="342900" indent="-342900" algn="l" defTabSz="914400" rtl="0" eaLnBrk="1" latinLnBrk="0" hangingPunct="1">
+              <a:lnSpc>
+                <a:spcPct val="90000"/>
+              </a:lnSpc>
+              <a:spcBef>
+                <a:spcPts val="1000"/>
+              </a:spcBef>
+              <a:buClr>
+                <a:srgbClr val="00B050"/>
+              </a:buClr>
+              <a:buFont typeface="Wingdings" panose="05000000000000000000" pitchFamily="2" charset="2"/>
+              <a:buChar char="Ø"/>
+              <a:defRPr sz="2400" kern="1200">
+                <a:solidFill>
+                  <a:schemeClr val="tx1"/>
+                </a:solidFill>
+                <a:latin typeface="Aptos" panose="020B0004020202020204" pitchFamily="34" charset="0"/>
+                <a:ea typeface="+mn-ea"/>
+                <a:cs typeface="+mn-cs"/>
+              </a:defRPr>
+            </a:lvl1pPr>
+            <a:lvl2pPr marL="685800" indent="-228600" algn="l" defTabSz="914400" rtl="0" eaLnBrk="1" latinLnBrk="0" hangingPunct="1">
+              <a:lnSpc>
+                <a:spcPct val="90000"/>
+              </a:lnSpc>
+              <a:spcBef>
+                <a:spcPts val="500"/>
+              </a:spcBef>
+              <a:buClr>
+                <a:srgbClr val="00B050"/>
+              </a:buClr>
+              <a:buFont typeface="Wingdings" panose="05000000000000000000" pitchFamily="2" charset="2"/>
+              <a:buChar char="§"/>
+              <a:defRPr sz="2000" kern="1200">
+                <a:solidFill>
+                  <a:schemeClr val="tx1"/>
+                </a:solidFill>
+                <a:latin typeface="Aptos" panose="020B0004020202020204" pitchFamily="34" charset="0"/>
+                <a:ea typeface="+mn-ea"/>
+                <a:cs typeface="+mn-cs"/>
+              </a:defRPr>
+            </a:lvl2pPr>
+            <a:lvl3pPr marL="1143000" indent="-228600" algn="l" defTabSz="914400" rtl="0" eaLnBrk="1" latinLnBrk="0" hangingPunct="1">
+              <a:lnSpc>
+                <a:spcPct val="90000"/>
+              </a:lnSpc>
+              <a:spcBef>
+                <a:spcPts val="500"/>
+              </a:spcBef>
+              <a:buClr>
+                <a:srgbClr val="00B050"/>
+              </a:buClr>
+              <a:buFont typeface="Arial" panose="020B0604020202020204" pitchFamily="34" charset="0"/>
+              <a:buChar char="•"/>
+              <a:defRPr sz="1800" kern="1200">
+                <a:solidFill>
+                  <a:schemeClr val="tx1"/>
+                </a:solidFill>
+                <a:latin typeface="Aptos" panose="020B0004020202020204" pitchFamily="34" charset="0"/>
+                <a:ea typeface="+mn-ea"/>
+                <a:cs typeface="+mn-cs"/>
+              </a:defRPr>
+            </a:lvl3pPr>
+            <a:lvl4pPr marL="1600200" indent="-228600" algn="l" defTabSz="914400" rtl="0" eaLnBrk="1" latinLnBrk="0" hangingPunct="1">
+              <a:lnSpc>
+                <a:spcPct val="90000"/>
+              </a:lnSpc>
+              <a:spcBef>
+                <a:spcPts val="500"/>
+              </a:spcBef>
+              <a:buClr>
+                <a:srgbClr val="00B050"/>
+              </a:buClr>
+              <a:buFont typeface="Courier New" panose="02070309020205020404" pitchFamily="49" charset="0"/>
+              <a:buChar char="o"/>
+              <a:defRPr sz="1600" kern="1200">
+                <a:solidFill>
+                  <a:schemeClr val="tx1"/>
+                </a:solidFill>
+                <a:latin typeface="Aptos" panose="020B0004020202020204" pitchFamily="34" charset="0"/>
+                <a:ea typeface="+mn-ea"/>
+                <a:cs typeface="+mn-cs"/>
+              </a:defRPr>
+            </a:lvl4pPr>
+            <a:lvl5pPr marL="2057400" indent="-228600" algn="l" defTabSz="914400" rtl="0" eaLnBrk="1" latinLnBrk="0" hangingPunct="1">
+              <a:lnSpc>
+                <a:spcPct val="90000"/>
+              </a:lnSpc>
+              <a:spcBef>
+                <a:spcPts val="500"/>
+              </a:spcBef>
+              <a:buClr>
+                <a:srgbClr val="00B050"/>
+              </a:buClr>
+              <a:buFont typeface="Times New Roman" panose="02020603050405020304" pitchFamily="18" charset="0"/>
+              <a:buChar char="̶"/>
+              <a:defRPr sz="1600" kern="1200">
+                <a:solidFill>
+                  <a:schemeClr val="tx1"/>
+                </a:solidFill>
+                <a:latin typeface="Aptos" panose="020B0004020202020204" pitchFamily="34" charset="0"/>
+                <a:ea typeface="+mn-ea"/>
+                <a:cs typeface="+mn-cs"/>
+              </a:defRPr>
+            </a:lvl5pPr>
+            <a:lvl6pPr marL="2514600" indent="-228600" algn="l" defTabSz="914400" rtl="0" eaLnBrk="1" latinLnBrk="0" hangingPunct="1">
+              <a:lnSpc>
+                <a:spcPct val="90000"/>
+              </a:lnSpc>
+              <a:spcBef>
+                <a:spcPts val="500"/>
+              </a:spcBef>
+              <a:buFont typeface="Arial" panose="020B0604020202020204" pitchFamily="34" charset="0"/>
+              <a:buChar char="•"/>
+              <a:defRPr sz="1800" kern="1200">
+                <a:solidFill>
+                  <a:schemeClr val="tx1"/>
+                </a:solidFill>
+                <a:latin typeface="+mn-lt"/>
+                <a:ea typeface="+mn-ea"/>
+                <a:cs typeface="+mn-cs"/>
+              </a:defRPr>
+            </a:lvl6pPr>
+            <a:lvl7pPr marL="2971800" indent="-228600" algn="l" defTabSz="914400" rtl="0" eaLnBrk="1" latinLnBrk="0" hangingPunct="1">
+              <a:lnSpc>
+                <a:spcPct val="90000"/>
+              </a:lnSpc>
+              <a:spcBef>
+                <a:spcPts val="500"/>
+              </a:spcBef>
+              <a:buFont typeface="Arial" panose="020B0604020202020204" pitchFamily="34" charset="0"/>
+              <a:buChar char="•"/>
+              <a:defRPr sz="1800" kern="1200">
+                <a:solidFill>
+                  <a:schemeClr val="tx1"/>
+                </a:solidFill>
+                <a:latin typeface="+mn-lt"/>
+                <a:ea typeface="+mn-ea"/>
+                <a:cs typeface="+mn-cs"/>
+              </a:defRPr>
+            </a:lvl7pPr>
+            <a:lvl8pPr marL="3429000" indent="-228600" algn="l" defTabSz="914400" rtl="0" eaLnBrk="1" latinLnBrk="0" hangingPunct="1">
+              <a:lnSpc>
+                <a:spcPct val="90000"/>
+              </a:lnSpc>
+              <a:spcBef>
+                <a:spcPts val="500"/>
+              </a:spcBef>
+              <a:buFont typeface="Arial" panose="020B0604020202020204" pitchFamily="34" charset="0"/>
+              <a:buChar char="•"/>
+              <a:defRPr sz="1800" kern="1200">
+                <a:solidFill>
+                  <a:schemeClr val="tx1"/>
+                </a:solidFill>
+                <a:latin typeface="+mn-lt"/>
+                <a:ea typeface="+mn-ea"/>
+                <a:cs typeface="+mn-cs"/>
+              </a:defRPr>
+            </a:lvl8pPr>
+            <a:lvl9pPr marL="3886200" indent="-228600" algn="l" defTabSz="914400" rtl="0" eaLnBrk="1" latinLnBrk="0" hangingPunct="1">
+              <a:lnSpc>
+                <a:spcPct val="90000"/>
+              </a:lnSpc>
+              <a:spcBef>
+                <a:spcPts val="500"/>
+              </a:spcBef>
+              <a:buFont typeface="Arial" panose="020B0604020202020204" pitchFamily="34" charset="0"/>
+              <a:buChar char="•"/>
+              <a:defRPr sz="1800" kern="1200">
+                <a:solidFill>
+                  <a:schemeClr val="tx1"/>
+                </a:solidFill>
+                <a:latin typeface="+mn-lt"/>
+                <a:ea typeface="+mn-ea"/>
+                <a:cs typeface="+mn-cs"/>
+              </a:defRPr>
+            </a:lvl9pPr>
+          </a:lstStyle>
+          <a:p>
+            <a:pPr marL="0" indent="0" algn="ctr">
+              <a:buNone/>
+            </a:pPr>
+            <a:r>
+              <a:rPr lang="en-US" sz="3200" dirty="0"/>
+              <a:t>Aim</a:t>
+            </a:r>
+          </a:p>
+          <a:p>
+            <a:pPr marL="0" indent="0" algn="ctr">
+              <a:buNone/>
+            </a:pPr>
+            <a:r>
+              <a:rPr lang="en-US" sz="3200" dirty="0"/>
+              <a:t>Background (CGM data)</a:t>
+            </a:r>
+          </a:p>
+          <a:p>
+            <a:pPr marL="0" indent="0" algn="ctr">
+              <a:buNone/>
+            </a:pPr>
+            <a:r>
+              <a:rPr lang="en-US" sz="3200" dirty="0"/>
+              <a:t>The dataset (</a:t>
+            </a:r>
+            <a:r>
+              <a:rPr lang="en-US" sz="3200" dirty="0" err="1"/>
+              <a:t>MetaboNet</a:t>
+            </a:r>
+            <a:r>
+              <a:rPr lang="en-US" sz="3200" dirty="0"/>
+              <a:t> – </a:t>
+            </a:r>
+            <a:r>
+              <a:rPr lang="en-US" sz="3200" dirty="0" err="1"/>
+              <a:t>ReplaceBG</a:t>
+            </a:r>
+            <a:r>
+              <a:rPr lang="en-US" sz="3200" dirty="0"/>
+              <a:t>)</a:t>
+            </a:r>
+          </a:p>
+          <a:p>
+            <a:pPr marL="0" indent="0" algn="ctr">
+              <a:buNone/>
+            </a:pPr>
+            <a:r>
+              <a:rPr lang="en-US" sz="3200" dirty="0"/>
+              <a:t>Setting up</a:t>
+            </a:r>
+          </a:p>
+          <a:p>
+            <a:pPr marL="0" indent="0" algn="ctr">
+              <a:buNone/>
+            </a:pPr>
+            <a:r>
+              <a:rPr lang="en-US" sz="3200" dirty="0"/>
+              <a:t>Preparing the data</a:t>
+            </a:r>
+          </a:p>
+          <a:p>
+            <a:pPr marL="0" indent="0" algn="ctr">
+              <a:buNone/>
+            </a:pPr>
+            <a:r>
+              <a:rPr lang="en-US" sz="3200" dirty="0"/>
+              <a:t>Some feature extraction</a:t>
+            </a:r>
+          </a:p>
+          <a:p>
+            <a:pPr marL="0" indent="0" algn="ctr">
+              <a:buNone/>
+            </a:pPr>
+            <a:r>
+              <a:rPr lang="en-US" sz="3200" dirty="0"/>
+              <a:t>ML Model (Simple and explainable)</a:t>
+            </a:r>
+          </a:p>
+          <a:p>
+            <a:pPr marL="0" indent="0" algn="ctr">
+              <a:buNone/>
+            </a:pPr>
+            <a:r>
+              <a:rPr lang="en-US" sz="3200" dirty="0"/>
+              <a:t>Training and testing</a:t>
+            </a:r>
+          </a:p>
+          <a:p>
+            <a:pPr marL="0" indent="0" algn="ctr">
+              <a:buNone/>
+            </a:pPr>
+            <a:r>
+              <a:rPr lang="en-US" sz="3200" dirty="0"/>
+              <a:t>Exporting</a:t>
+            </a:r>
+          </a:p>
+          <a:p>
+            <a:pPr marL="0" indent="0" algn="ctr">
+              <a:buNone/>
+            </a:pPr>
+            <a:endParaRPr lang="en-US" sz="3200" dirty="0"/>
+          </a:p>
+        </p:txBody>
+      </p:sp>
+    </p:spTree>
+    <p:extLst>
+      <p:ext uri="{BB962C8B-B14F-4D97-AF65-F5344CB8AC3E}">
+        <p14:creationId xmlns:p14="http://schemas.microsoft.com/office/powerpoint/2010/main" val="764825472"/>
       </p:ext>
     </p:extLst>
   </p:cSld>
